--- a/presentations/跨出牆外的服事_30分鐘簡報.pptx
+++ b/presentations/跨出牆外的服事_30分鐘簡報.pptx
@@ -2700,7 +2700,31 @@
                 <a:ea typeface="微軟正黑體"/>
                 <a:latin typeface="微軟正黑體"/>
               </a:rPr>
-              <a:t>日本去年成立了『こども家庭庁』，韓國也有。台灣呢？我們連一個專責部會都沒有。</a:t>
+              <a:t>而台灣現在有幾個專責的兒少部會？(停一秒) 零個。</a:t>
+            </a:r>
+          </a:p>
+          <a:p>
+            <a:r>
+              <a:rPr sz="1200" b="0">
+                <a:solidFill>
+                  <a:srgbClr val="1A1A1A"/>
+                </a:solidFill>
+                <a:ea typeface="微軟正黑體"/>
+                <a:latin typeface="微軟正黑體"/>
+              </a:rPr>
+              <a:t/>
+            </a:r>
+          </a:p>
+          <a:p>
+            <a:r>
+              <a:rPr sz="1200" b="0">
+                <a:solidFill>
+                  <a:srgbClr val="1A1A1A"/>
+                </a:solidFill>
+                <a:ea typeface="微軟正黑體"/>
+                <a:latin typeface="微軟正黑體"/>
+              </a:rPr>
+              <a:t>日本去年成立了『こども家庭庁』，韓國有保健福祉部專責處。台灣呢？我們連一個專責部會都沒有。</a:t>
             </a:r>
           </a:p>
           <a:p>
@@ -7877,8 +7901,20 @@
                 <a:ea typeface="微軟正黑體"/>
                 <a:latin typeface="微軟正黑體"/>
               </a:rPr>
-              <a:t>唾液快篩
-二層檢測</a:t>
+              <a:t>唾液快篩</a:t>
+            </a:r>
+          </a:p>
+          <a:p>
+            <a:pPr algn="ctr"/>
+            <a:r>
+              <a:rPr sz="3200" b="1">
+                <a:solidFill>
+                  <a:srgbClr val="FFFFFF"/>
+                </a:solidFill>
+                <a:ea typeface="微軟正黑體"/>
+                <a:latin typeface="微軟正黑體"/>
+              </a:rPr>
+              <a:t>二層檢測</a:t>
             </a:r>
           </a:p>
         </p:txBody>
@@ -14043,7 +14079,7 @@
         <p:spPr>
           <a:xfrm>
             <a:off x="914400" y="2103120"/>
-            <a:ext cx="3017520" cy="2560320"/>
+            <a:ext cx="3017520" cy="2377440"/>
           </a:xfrm>
           <a:prstGeom prst="rect">
             <a:avLst/>
@@ -14102,7 +14138,7 @@
           <a:p>
             <a:pPr algn="ctr"/>
             <a:r>
-              <a:rPr sz="7200" b="1">
+              <a:rPr sz="8400" b="1">
                 <a:solidFill>
                   <a:srgbClr val="C9A247"/>
                 </a:solidFill>
@@ -14122,8 +14158,8 @@
         </p:nvSpPr>
         <p:spPr>
           <a:xfrm>
-            <a:off x="914400" y="3886200"/>
-            <a:ext cx="3017520" cy="731520"/>
+            <a:off x="914400" y="3794760"/>
+            <a:ext cx="3017520" cy="640080"/>
           </a:xfrm>
           <a:prstGeom prst="rect">
             <a:avLst/>
@@ -14138,7 +14174,7 @@
           <a:p>
             <a:pPr algn="ctr"/>
             <a:r>
-              <a:rPr sz="1600" b="0">
+              <a:rPr sz="1800" b="0">
                 <a:solidFill>
                   <a:srgbClr val="FFFFFF"/>
                 </a:solidFill>
@@ -14159,7 +14195,7 @@
         <p:spPr>
           <a:xfrm>
             <a:off x="4572000" y="2103120"/>
-            <a:ext cx="3017520" cy="2560320"/>
+            <a:ext cx="3017520" cy="2377440"/>
           </a:xfrm>
           <a:prstGeom prst="rect">
             <a:avLst/>
@@ -14218,7 +14254,7 @@
           <a:p>
             <a:pPr algn="ctr"/>
             <a:r>
-              <a:rPr sz="7200" b="1">
+              <a:rPr sz="8400" b="1">
                 <a:solidFill>
                   <a:srgbClr val="C9A247"/>
                 </a:solidFill>
@@ -14238,8 +14274,8 @@
         </p:nvSpPr>
         <p:spPr>
           <a:xfrm>
-            <a:off x="4572000" y="3886200"/>
-            <a:ext cx="3017520" cy="731520"/>
+            <a:off x="4572000" y="3794760"/>
+            <a:ext cx="3017520" cy="640080"/>
           </a:xfrm>
           <a:prstGeom prst="rect">
             <a:avLst/>
@@ -14254,7 +14290,7 @@
           <a:p>
             <a:pPr algn="ctr"/>
             <a:r>
-              <a:rPr sz="1600" b="0">
+              <a:rPr sz="1800" b="0">
                 <a:solidFill>
                   <a:srgbClr val="FFFFFF"/>
                 </a:solidFill>
@@ -14275,7 +14311,7 @@
         <p:spPr>
           <a:xfrm>
             <a:off x="8229600" y="2103120"/>
-            <a:ext cx="3017520" cy="2560320"/>
+            <a:ext cx="3017520" cy="2377440"/>
           </a:xfrm>
           <a:prstGeom prst="rect">
             <a:avLst/>
@@ -14318,8 +14354,8 @@
         </p:nvSpPr>
         <p:spPr>
           <a:xfrm>
-            <a:off x="8229600" y="2468880"/>
-            <a:ext cx="3017520" cy="1280160"/>
+            <a:off x="8229600" y="2377440"/>
+            <a:ext cx="3017520" cy="1371600"/>
           </a:xfrm>
           <a:prstGeom prst="rect">
             <a:avLst/>
@@ -14334,14 +14370,14 @@
           <a:p>
             <a:pPr algn="ctr"/>
             <a:r>
-              <a:rPr sz="4800" b="1">
+              <a:rPr sz="8400" b="1">
                 <a:solidFill>
                   <a:srgbClr val="C9A247"/>
                 </a:solidFill>
                 <a:ea typeface="微軟正黑體"/>
                 <a:latin typeface="微軟正黑體"/>
               </a:rPr>
-              <a:t>こども</a:t>
+              <a:t>0</a:t>
             </a:r>
           </a:p>
         </p:txBody>
@@ -14354,8 +14390,8 @@
         </p:nvSpPr>
         <p:spPr>
           <a:xfrm>
-            <a:off x="8229600" y="3886200"/>
-            <a:ext cx="3017520" cy="731520"/>
+            <a:off x="8229600" y="3794760"/>
+            <a:ext cx="3017520" cy="640080"/>
           </a:xfrm>
           <a:prstGeom prst="rect">
             <a:avLst/>
@@ -14370,29 +14406,64 @@
           <a:p>
             <a:pPr algn="ctr"/>
             <a:r>
-              <a:rPr sz="1600" b="0">
+              <a:rPr sz="1800" b="0">
                 <a:solidFill>
                   <a:srgbClr val="FFFFFF"/>
                 </a:solidFill>
                 <a:ea typeface="微軟正黑體"/>
                 <a:latin typeface="微軟正黑體"/>
               </a:rPr>
-              <a:t>對標日本
-家庭庁</a:t>
-            </a:r>
-          </a:p>
-        </p:txBody>
-      </p:sp>
-      <p:sp>
-        <p:nvSpPr>
-          <p:cNvPr id="14" name="Rectangle 13"/>
+              <a:t>台灣專責部會</a:t>
+            </a:r>
+          </a:p>
+        </p:txBody>
+      </p:sp>
+      <p:sp>
+        <p:nvSpPr>
+          <p:cNvPr id="14" name="TextBox 13"/>
+          <p:cNvSpPr txBox="1"/>
+          <p:nvPr/>
+        </p:nvSpPr>
+        <p:spPr>
+          <a:xfrm>
+            <a:off x="914400" y="4663440"/>
+            <a:ext cx="10332720" cy="365760"/>
+          </a:xfrm>
+          <a:prstGeom prst="rect">
+            <a:avLst/>
+          </a:prstGeom>
+          <a:noFill/>
+        </p:spPr>
+        <p:txBody>
+          <a:bodyPr wrap="square" anchor="t">
+            <a:spAutoFit/>
+          </a:bodyPr>
+          <a:lstStyle/>
+          <a:p>
+            <a:pPr algn="ctr"/>
+            <a:r>
+              <a:rPr sz="1400" b="0">
+                <a:solidFill>
+                  <a:srgbClr val="6B6B6B"/>
+                </a:solidFill>
+                <a:ea typeface="微軟正黑體"/>
+                <a:latin typeface="微軟正黑體"/>
+              </a:rPr>
+              <a:t>對標：日本こども家庭庁  ·  韓國保健福祉部</a:t>
+            </a:r>
+          </a:p>
+        </p:txBody>
+      </p:sp>
+      <p:sp>
+        <p:nvSpPr>
+          <p:cNvPr id="15" name="Rectangle 14"/>
           <p:cNvSpPr/>
           <p:nvPr/>
         </p:nvSpPr>
         <p:spPr>
           <a:xfrm>
-            <a:off x="914400" y="4983480"/>
-            <a:ext cx="10332720" cy="914400"/>
+            <a:off x="914400" y="5166360"/>
+            <a:ext cx="10332720" cy="822960"/>
           </a:xfrm>
           <a:prstGeom prst="rect">
             <a:avLst/>
@@ -14429,14 +14500,14 @@
       </p:sp>
       <p:sp>
         <p:nvSpPr>
-          <p:cNvPr id="15" name="TextBox 14"/>
+          <p:cNvPr id="16" name="TextBox 15"/>
           <p:cNvSpPr txBox="1"/>
           <p:nvPr/>
         </p:nvSpPr>
         <p:spPr>
           <a:xfrm>
-            <a:off x="914400" y="4983480"/>
-            <a:ext cx="10332720" cy="914400"/>
+            <a:off x="914400" y="5166360"/>
+            <a:ext cx="10332720" cy="822960"/>
           </a:xfrm>
           <a:prstGeom prst="rect">
             <a:avLst/>
@@ -14465,7 +14536,7 @@
       </p:sp>
       <p:sp>
         <p:nvSpPr>
-          <p:cNvPr id="16" name="TextBox 15"/>
+          <p:cNvPr id="17" name="TextBox 16"/>
           <p:cNvSpPr txBox="1"/>
           <p:nvPr/>
         </p:nvSpPr>
@@ -14501,7 +14572,7 @@
       </p:sp>
       <p:sp>
         <p:nvSpPr>
-          <p:cNvPr id="17" name="TextBox 16"/>
+          <p:cNvPr id="18" name="TextBox 17"/>
           <p:cNvSpPr txBox="1"/>
           <p:nvPr/>
         </p:nvSpPr>
